--- a/Store Support/Projects/VET_Dashboard/reports/VET_Executive_Report_WK08.pptx
+++ b/Store Support/Projects/VET_Dashboard/reports/VET_Executive_Report_WK08.pptx
@@ -12,7 +12,7 @@
     <p:sldId id="260" r:id="rId11"/>
     <p:sldId id="261" r:id="rId12"/>
   </p:sldIdLst>
-  <p:sldSz cx="8778240" cy="6583680" type="screen4x3"/>
+  <p:sldSz cx="9144000" cy="6858000" type="screen4x3"/>
   <p:notesSz cx="6858000" cy="9144000"/>
   <p:defaultTextStyle>
     <a:defPPr>
@@ -3086,6 +3086,14 @@
 <file path=ppt/slides/slide1.xml><?xml version="1.0" encoding="utf-8"?>
 <p:sld xmlns:a="http://schemas.openxmlformats.org/drawingml/2006/main" xmlns:p="http://schemas.openxmlformats.org/presentationml/2006/main" xmlns:r="http://schemas.openxmlformats.org/officeDocument/2006/relationships">
   <p:cSld>
+    <p:bg>
+      <p:bgPr>
+        <a:solidFill>
+          <a:srgbClr val="1E3A8A"/>
+        </a:solidFill>
+        <a:effectLst/>
+      </p:bgPr>
+    </p:bg>
     <p:spTree>
       <p:nvGrpSpPr>
         <p:cNvPr id="1" name=""/>
@@ -3093,30 +3101,117 @@
         <p:nvPr/>
       </p:nvGrpSpPr>
       <p:grpSpPr/>
-      <p:pic>
-        <p:nvPicPr>
-          <p:cNvPr id="2" name="Picture 1" descr="image.jpg"/>
-          <p:cNvPicPr>
-            <a:picLocks noChangeAspect="1"/>
-          </p:cNvPicPr>
+      <p:sp>
+        <p:nvSpPr>
+          <p:cNvPr id="2" name="TextBox 1"/>
+          <p:cNvSpPr txBox="1"/>
           <p:nvPr/>
-        </p:nvPicPr>
-        <p:blipFill>
-          <a:blip r:embed="rId2"/>
-          <a:stretch>
-            <a:fillRect/>
-          </a:stretch>
-        </p:blipFill>
+        </p:nvSpPr>
         <p:spPr>
           <a:xfrm>
-            <a:off x="182880" y="182880"/>
-            <a:ext cx="8412480" cy="4414379"/>
+            <a:off x="457200" y="2286000"/>
+            <a:ext cx="8229600" cy="1645920"/>
           </a:xfrm>
           <a:prstGeom prst="rect">
             <a:avLst/>
           </a:prstGeom>
+          <a:noFill/>
         </p:spPr>
-      </p:pic>
+        <p:txBody>
+          <a:bodyPr wrap="none">
+            <a:spAutoFit/>
+          </a:bodyPr>
+          <a:lstStyle/>
+          <a:p>
+            <a:pPr algn="ctr"/>
+            <a:r>
+              <a:rPr sz="4400" b="1">
+                <a:solidFill>
+                  <a:srgbClr val="FFFFFF"/>
+                </a:solidFill>
+              </a:rPr>
+              <a:t>V.E.T. Executive Report</a:t>
+            </a:r>
+          </a:p>
+        </p:txBody>
+      </p:sp>
+      <p:sp>
+        <p:nvSpPr>
+          <p:cNvPr id="3" name="TextBox 2"/>
+          <p:cNvSpPr txBox="1"/>
+          <p:nvPr/>
+        </p:nvSpPr>
+        <p:spPr>
+          <a:xfrm>
+            <a:off x="457200" y="3840480"/>
+            <a:ext cx="8229600" cy="731520"/>
+          </a:xfrm>
+          <a:prstGeom prst="rect">
+            <a:avLst/>
+          </a:prstGeom>
+          <a:noFill/>
+        </p:spPr>
+        <p:txBody>
+          <a:bodyPr wrap="none">
+            <a:spAutoFit/>
+          </a:bodyPr>
+          <a:lstStyle/>
+          <a:p>
+            <a:pPr algn="ctr"/>
+            <a:r>
+              <a:rPr sz="2000">
+                <a:solidFill>
+                  <a:srgbClr val="FFFFFF"/>
+                </a:solidFill>
+              </a:rPr>
+              <a:t>Walmart Enterprise Transformation</a:t>
+            </a:r>
+          </a:p>
+        </p:txBody>
+      </p:sp>
+      <p:sp>
+        <p:nvSpPr>
+          <p:cNvPr id="4" name="Rectangle 3"/>
+          <p:cNvSpPr/>
+          <p:nvPr/>
+        </p:nvSpPr>
+        <p:spPr>
+          <a:xfrm>
+            <a:off x="0" y="6400800"/>
+            <a:ext cx="9144000" cy="457200"/>
+          </a:xfrm>
+          <a:prstGeom prst="rect">
+            <a:avLst/>
+          </a:prstGeom>
+          <a:solidFill>
+            <a:srgbClr val="FFC220"/>
+          </a:solidFill>
+          <a:ln>
+            <a:noFill/>
+          </a:ln>
+        </p:spPr>
+        <p:style>
+          <a:lnRef idx="1">
+            <a:schemeClr val="accent1"/>
+          </a:lnRef>
+          <a:fillRef idx="3">
+            <a:schemeClr val="accent1"/>
+          </a:fillRef>
+          <a:effectRef idx="2">
+            <a:schemeClr val="accent1"/>
+          </a:effectRef>
+          <a:fontRef idx="minor">
+            <a:schemeClr val="lt1"/>
+          </a:fontRef>
+        </p:style>
+        <p:txBody>
+          <a:bodyPr rtlCol="0" anchor="ctr"/>
+          <a:lstStyle/>
+          <a:p>
+            <a:pPr algn="ctr"/>
+          </a:p>
+        </p:txBody>
+      </p:sp>
     </p:spTree>
   </p:cSld>
   <p:clrMapOvr>
@@ -3151,8 +3246,8 @@
         </p:blipFill>
         <p:spPr>
           <a:xfrm>
-            <a:off x="182880" y="182880"/>
-            <a:ext cx="8412480" cy="2067398"/>
+            <a:off x="0" y="0"/>
+            <a:ext cx="9144000" cy="6858000"/>
           </a:xfrm>
           <a:prstGeom prst="rect">
             <a:avLst/>
@@ -3193,8 +3288,8 @@
         </p:blipFill>
         <p:spPr>
           <a:xfrm>
-            <a:off x="182880" y="182880"/>
-            <a:ext cx="8412480" cy="5751207"/>
+            <a:off x="0" y="0"/>
+            <a:ext cx="9144000" cy="3698369"/>
           </a:xfrm>
           <a:prstGeom prst="rect">
             <a:avLst/>
@@ -3235,8 +3330,8 @@
         </p:blipFill>
         <p:spPr>
           <a:xfrm>
-            <a:off x="182880" y="182880"/>
-            <a:ext cx="8412480" cy="3531991"/>
+            <a:off x="0" y="0"/>
+            <a:ext cx="9144000" cy="6858000"/>
           </a:xfrm>
           <a:prstGeom prst="rect">
             <a:avLst/>
@@ -3277,8 +3372,8 @@
         </p:blipFill>
         <p:spPr>
           <a:xfrm>
-            <a:off x="182880" y="182880"/>
-            <a:ext cx="8412480" cy="2156703"/>
+            <a:off x="0" y="0"/>
+            <a:ext cx="9144000" cy="1354127"/>
           </a:xfrm>
           <a:prstGeom prst="rect">
             <a:avLst/>
@@ -3319,8 +3414,8 @@
         </p:blipFill>
         <p:spPr>
           <a:xfrm>
-            <a:off x="182880" y="182880"/>
-            <a:ext cx="8412480" cy="1219006"/>
+            <a:off x="0" y="0"/>
+            <a:ext cx="9144000" cy="1019235"/>
           </a:xfrm>
           <a:prstGeom prst="rect">
             <a:avLst/>
